--- a/presentation/LexFlow_Pilot_Presentation.pptx
+++ b/presentation/LexFlow_Pilot_Presentation.pptx
@@ -440,7 +440,7 @@
                 </a:solidFill>
                 <a:latin typeface="Arial"/>
               </a:rPr>
-              <a:t>ALLGIFT TECHNOLOGIES LTD  /  SYNTHETIC PRESENTATION DEMO  /  22 OCTOBER 2026</a:t>
+              <a:t>ALLGIFT TECHNOLOGIES LTD  /  SYNTHETIC PRESENTATION DEMO  /  23 OCTOBER 2026</a:t>
             </a:r>
             <a:endParaRPr lang="en-GB" sz="900"/>
           </a:p>
@@ -865,7 +865,7 @@
                 </a:solidFill>
                 <a:latin typeface="Arial"/>
               </a:rPr>
-              <a:t>ALLGIFT TECHNOLOGIES LTD  /  SYNTHETIC PRESENTATION DEMO  /  22 OCTOBER 2026</a:t>
+              <a:t>ALLGIFT TECHNOLOGIES LTD  /  SYNTHETIC PRESENTATION DEMO  /  23 OCTOBER 2026</a:t>
             </a:r>
             <a:endParaRPr lang="en-GB" sz="900"/>
           </a:p>
@@ -998,7 +998,7 @@
                 </a:solidFill>
                 <a:latin typeface="Arial"/>
               </a:rPr>
-              <a:t>A precise client pilot agreement</a:t>
+              <a:t>Expand plugins and destinations</a:t>
             </a:r>
             <a:endParaRPr lang="en-GB" sz="3600"/>
           </a:p>
@@ -1034,7 +1034,7 @@
                 </a:solidFill>
                 <a:latin typeface="Arial"/>
               </a:rPr>
-              <a:t>Keep the first real integration as narrow as the demonstrated workflow.</a:t>
+              <a:t>Build the shared foundation, then validate Outlook intake and one actual destination.</a:t>
             </a:r>
             <a:endParaRPr lang="en-GB" sz="1900"/>
           </a:p>
@@ -1108,7 +1108,7 @@
                 </a:solidFill>
                 <a:latin typeface="Arial"/>
               </a:rPr>
-              <a:t>Decide with the office</a:t>
+              <a:t>Shared foundation — proposed</a:t>
             </a:r>
             <a:endParaRPr lang="en-GB" sz="2000"/>
           </a:p>
@@ -1144,7 +1144,7 @@
                 </a:solidFill>
                 <a:latin typeface="Arial"/>
               </a:rPr>
-              <a:t>Confirm the property-purchase schema, required approvals, dedicated hosting boundary, retention policy, representative sanitized documents and exact destination interface.</a:t>
+              <a:t>Separate scoped plugin credentials, integration setup and connection tests, versioned destination mappings, and queued delivery. Preserve the existing approval, idempotency and verified-receipt controls.</a:t>
             </a:r>
             <a:endParaRPr lang="en-GB" sz="1700"/>
           </a:p>
@@ -1218,7 +1218,7 @@
                 </a:solidFill>
                 <a:latin typeface="Arial"/>
               </a:rPr>
-              <a:t>Validate before live use</a:t>
+              <a:t>First integrations — proposed</a:t>
             </a:r>
             <a:endParaRPr lang="en-GB" sz="2000"/>
           </a:p>
@@ -1254,7 +1254,7 @@
                 </a:solidFill>
                 <a:latin typeface="Arial"/>
               </a:rPr>
-              <a:t>Validate the actual vendor import and receipt, client deployment and restore procedures. Evaluate sanitized office samples against agreed limits. Native Office plugins and SSO remain roadmap items.</a:t>
+              <a:t>Build Outlook intake and one office-selected vendor adapter against documented APIs/imports. Validate the exact product/version and durable receipt. Word template filling and cloud intake follow. Native plugins remain unimplemented.</a:t>
             </a:r>
             <a:endParaRPr lang="en-GB" sz="1700"/>
           </a:p>
@@ -1290,7 +1290,7 @@
                 </a:solidFill>
                 <a:latin typeface="Arial"/>
               </a:rPr>
-              <a:t>ALLGIFT TECHNOLOGIES LTD  /  SYNTHETIC PRESENTATION DEMO  /  22 OCTOBER 2026</a:t>
+              <a:t>ALLGIFT TECHNOLOGIES LTD  /  SYNTHETIC PRESENTATION DEMO  /  23 OCTOBER 2026</a:t>
             </a:r>
             <a:endParaRPr lang="en-GB" sz="900"/>
           </a:p>
@@ -1715,7 +1715,7 @@
                 </a:solidFill>
                 <a:latin typeface="Arial"/>
               </a:rPr>
-              <a:t>ALLGIFT TECHNOLOGIES LTD  /  SYNTHETIC PRESENTATION DEMO  /  22 OCTOBER 2026</a:t>
+              <a:t>ALLGIFT TECHNOLOGIES LTD  /  SYNTHETIC PRESENTATION DEMO  /  23 OCTOBER 2026</a:t>
             </a:r>
             <a:endParaRPr lang="en-GB" sz="900"/>
           </a:p>
@@ -2140,7 +2140,7 @@
                 </a:solidFill>
                 <a:latin typeface="Arial"/>
               </a:rPr>
-              <a:t>ALLGIFT TECHNOLOGIES LTD  /  SYNTHETIC PRESENTATION DEMO  /  22 OCTOBER 2026</a:t>
+              <a:t>ALLGIFT TECHNOLOGIES LTD  /  SYNTHETIC PRESENTATION DEMO  /  23 OCTOBER 2026</a:t>
             </a:r>
             <a:endParaRPr lang="en-GB" sz="900"/>
           </a:p>
@@ -2565,7 +2565,7 @@
                 </a:solidFill>
                 <a:latin typeface="Arial"/>
               </a:rPr>
-              <a:t>ALLGIFT TECHNOLOGIES LTD  /  SYNTHETIC PRESENTATION DEMO  /  22 OCTOBER 2026</a:t>
+              <a:t>ALLGIFT TECHNOLOGIES LTD  /  SYNTHETIC PRESENTATION DEMO  /  23 OCTOBER 2026</a:t>
             </a:r>
             <a:endParaRPr lang="en-GB" sz="900"/>
           </a:p>
@@ -3026,7 +3026,7 @@
                 </a:solidFill>
                 <a:latin typeface="Arial"/>
               </a:rPr>
-              <a:t>ALLGIFT TECHNOLOGIES LTD  /  SYNTHETIC PRESENTATION DEMO  /  22 OCTOBER 2026</a:t>
+              <a:t>ALLGIFT TECHNOLOGIES LTD  /  SYNTHETIC PRESENTATION DEMO  /  23 OCTOBER 2026</a:t>
             </a:r>
             <a:endParaRPr lang="en-GB" sz="900"/>
           </a:p>
@@ -3451,7 +3451,7 @@
                 </a:solidFill>
                 <a:latin typeface="Arial"/>
               </a:rPr>
-              <a:t>ALLGIFT TECHNOLOGIES LTD  /  SYNTHETIC PRESENTATION DEMO  /  22 OCTOBER 2026</a:t>
+              <a:t>ALLGIFT TECHNOLOGIES LTD  /  SYNTHETIC PRESENTATION DEMO  /  23 OCTOBER 2026</a:t>
             </a:r>
             <a:endParaRPr lang="en-GB" sz="900"/>
           </a:p>
@@ -3876,7 +3876,7 @@
                 </a:solidFill>
                 <a:latin typeface="Arial"/>
               </a:rPr>
-              <a:t>ALLGIFT TECHNOLOGIES LTD  /  SYNTHETIC PRESENTATION DEMO  /  22 OCTOBER 2026</a:t>
+              <a:t>ALLGIFT TECHNOLOGIES LTD  /  SYNTHETIC PRESENTATION DEMO  /  23 OCTOBER 2026</a:t>
             </a:r>
             <a:endParaRPr lang="en-GB" sz="900"/>
           </a:p>
@@ -4301,7 +4301,7 @@
                 </a:solidFill>
                 <a:latin typeface="Arial"/>
               </a:rPr>
-              <a:t>ALLGIFT TECHNOLOGIES LTD  /  SYNTHETIC PRESENTATION DEMO  /  22 OCTOBER 2026</a:t>
+              <a:t>ALLGIFT TECHNOLOGIES LTD  /  SYNTHETIC PRESENTATION DEMO  /  23 OCTOBER 2026</a:t>
             </a:r>
             <a:endParaRPr lang="en-GB" sz="900"/>
           </a:p>
@@ -4726,7 +4726,7 @@
                 </a:solidFill>
                 <a:latin typeface="Arial"/>
               </a:rPr>
-              <a:t>ALLGIFT TECHNOLOGIES LTD  /  SYNTHETIC PRESENTATION DEMO  /  22 OCTOBER 2026</a:t>
+              <a:t>ALLGIFT TECHNOLOGIES LTD  /  SYNTHETIC PRESENTATION DEMO  /  23 OCTOBER 2026</a:t>
             </a:r>
             <a:endParaRPr lang="en-GB" sz="900"/>
           </a:p>
@@ -4969,7 +4969,7 @@
                 </a:solidFill>
                 <a:latin typeface="Arial"/>
               </a:rPr>
-              <a:t>What to measure</a:t>
+              <a:t>Four analytics tabs</a:t>
             </a:r>
             <a:endParaRPr lang="en-GB" sz="2000"/>
           </a:p>
@@ -5005,7 +5005,7 @@
                 </a:solidFill>
                 <a:latin typeface="Arial"/>
               </a:rPr>
-              <a:t>The synthetic corpus passed 64 checks across 12 cases, including scans, missing values and conflicts. Office metrics cover corrections, review time, confirmed handoffs and audit completeness.</a:t>
+              <a:t>Filter by intake receipt period, workflow, source and demo/live cohort. Inspect extraction and review, workload and median/P90 timing, delivery and audit. Charts have exact-value tables, case links and aggregate CSV export.</a:t>
             </a:r>
             <a:endParaRPr lang="en-GB" sz="1700"/>
           </a:p>
@@ -5079,7 +5079,7 @@
                 </a:solidFill>
                 <a:latin typeface="Arial"/>
               </a:rPr>
-              <a:t>How to compare</a:t>
+              <a:t>Compare the right measures</a:t>
             </a:r>
             <a:endParaRPr lang="en-GB" sz="2000"/>
           </a:p>
@@ -5115,7 +5115,7 @@
                 </a:solidFill>
                 <a:latin typeface="Arial"/>
               </a:rPr>
-              <a:t>Synthetic pass rates are regression evidence, not office accuracy. Record a manual baseline and a separate sanitized cohort. Measure handling time separately from elapsed approval time.</a:t>
+              <a:t>First-extraction coverage differs from human-completed fields. Elapsed approval time includes waiting; staff handling time and re-keying errors need separate office measurements. Synthetic checks do not establish customer accuracy or savings.</a:t>
             </a:r>
             <a:endParaRPr lang="en-GB" sz="1700"/>
           </a:p>
@@ -5151,7 +5151,7 @@
                 </a:solidFill>
                 <a:latin typeface="Arial"/>
               </a:rPr>
-              <a:t>ALLGIFT TECHNOLOGIES LTD  /  SYNTHETIC PRESENTATION DEMO  /  22 OCTOBER 2026</a:t>
+              <a:t>ALLGIFT TECHNOLOGIES LTD  /  SYNTHETIC PRESENTATION DEMO  /  23 OCTOBER 2026</a:t>
             </a:r>
             <a:endParaRPr lang="en-GB" sz="900"/>
           </a:p>

--- a/presentation/LexFlow_Pilot_Presentation.pptx
+++ b/presentation/LexFlow_Pilot_Presentation.pptx
@@ -440,7 +440,7 @@
                 </a:solidFill>
                 <a:latin typeface="Arial"/>
               </a:rPr>
-              <a:t>ALLGIFT TECHNOLOGIES LTD  /  SYNTHETIC PRESENTATION DEMO  /  23 OCTOBER 2026</a:t>
+              <a:t>ALLGIFT TECHNOLOGIES LTD  /  SYNTHETIC PRESENTATION DEMO  /  30 OCTOBER 2026</a:t>
             </a:r>
             <a:endParaRPr lang="en-GB" sz="900"/>
           </a:p>
@@ -865,7 +865,7 @@
                 </a:solidFill>
                 <a:latin typeface="Arial"/>
               </a:rPr>
-              <a:t>ALLGIFT TECHNOLOGIES LTD  /  SYNTHETIC PRESENTATION DEMO  /  23 OCTOBER 2026</a:t>
+              <a:t>ALLGIFT TECHNOLOGIES LTD  /  SYNTHETIC PRESENTATION DEMO  /  30 OCTOBER 2026</a:t>
             </a:r>
             <a:endParaRPr lang="en-GB" sz="900"/>
           </a:p>
@@ -962,7 +962,7 @@
                 </a:solidFill>
                 <a:latin typeface="Arial"/>
               </a:rPr>
-              <a:t>10 / WHAT IS NEXT</a:t>
+              <a:t>10 / DESTINATION EXTENSION</a:t>
             </a:r>
             <a:endParaRPr lang="en-GB" sz="1200"/>
           </a:p>
@@ -998,7 +998,7 @@
                 </a:solidFill>
                 <a:latin typeface="Arial"/>
               </a:rPr>
-              <a:t>Expand plugins and destinations</a:t>
+              <a:t>Prepare the ProNotar32 connection</a:t>
             </a:r>
             <a:endParaRPr lang="en-GB" sz="3600"/>
           </a:p>
@@ -1034,7 +1034,7 @@
                 </a:solidFill>
                 <a:latin typeface="Arial"/>
               </a:rPr>
-              <a:t>Build the shared foundation, then validate Outlook intake and one actual destination.</a:t>
+              <a:t>The case and mapping foundation is implemented; vendor import still needs validation.</a:t>
             </a:r>
             <a:endParaRPr lang="en-GB" sz="1900"/>
           </a:p>
@@ -1108,7 +1108,7 @@
                 </a:solidFill>
                 <a:latin typeface="Arial"/>
               </a:rPr>
-              <a:t>Shared foundation — proposed</a:t>
+              <a:t>Implemented foundation</a:t>
             </a:r>
             <a:endParaRPr lang="en-GB" sz="2000"/>
           </a:p>
@@ -1144,7 +1144,7 @@
                 </a:solidFill>
                 <a:latin typeface="Arial"/>
               </a:rPr>
-              <a:t>Separate scoped plugin credentials, integration setup and connection tests, versioned destination mappings, and queued delivery. Preserve the existing approval, idempotency and verified-receipt controls.</a:t>
+              <a:t>Encrypted additional parties and properties, office references, immutable mapping revisions and a canonical JSON adapter. Approval freezes the complete case and mapping; an API serves approved case data.</a:t>
             </a:r>
             <a:endParaRPr lang="en-GB" sz="1700"/>
           </a:p>
@@ -1218,7 +1218,7 @@
                 </a:solidFill>
                 <a:latin typeface="Arial"/>
               </a:rPr>
-              <a:t>First integrations — proposed</a:t>
+              <a:t>Next: validate ProNotar32</a:t>
             </a:r>
             <a:endParaRPr lang="en-GB" sz="2000"/>
           </a:p>
@@ -1254,7 +1254,7 @@
                 </a:solidFill>
                 <a:latin typeface="Arial"/>
               </a:rPr>
-              <a:t>Build Outlook intake and one office-selected vendor adapter against documented APIs/imports. Validate the exact product/version and durable receipt. Word template filling and cloud intake follow. Native plugins remain unimplemented.</a:t>
+              <a:t>Obtain the office's version, import schema, accepted sample files and test environment. Implement and verify the vendor adapter. ProNotar delivery is blocked; native plugins, scoped credentials and queued sends remain planned.</a:t>
             </a:r>
             <a:endParaRPr lang="en-GB" sz="1700"/>
           </a:p>
@@ -1290,7 +1290,7 @@
                 </a:solidFill>
                 <a:latin typeface="Arial"/>
               </a:rPr>
-              <a:t>ALLGIFT TECHNOLOGIES LTD  /  SYNTHETIC PRESENTATION DEMO  /  23 OCTOBER 2026</a:t>
+              <a:t>ALLGIFT TECHNOLOGIES LTD  /  SYNTHETIC PRESENTATION DEMO  /  30 OCTOBER 2026</a:t>
             </a:r>
             <a:endParaRPr lang="en-GB" sz="900"/>
           </a:p>
@@ -1569,7 +1569,7 @@
                 </a:solidFill>
                 <a:latin typeface="Arial"/>
               </a:rPr>
-              <a:t>A working case from PDF or scan to reviewed data, frozen approval, authenticated HTTP handoff and signed receipt, with PostgreSQL, recovery and extraction evidence.</a:t>
+              <a:t>Reviewed case details, frozen mappings, canonical exports and signed HTTP handoff. All 152 tests passed on PostgreSQL 17; the new case-details workflow passed desktop/mobile browser checks. Vendor acceptance remains separate.</a:t>
             </a:r>
             <a:endParaRPr lang="en-GB" sz="1700"/>
           </a:p>
@@ -1715,7 +1715,7 @@
                 </a:solidFill>
                 <a:latin typeface="Arial"/>
               </a:rPr>
-              <a:t>ALLGIFT TECHNOLOGIES LTD  /  SYNTHETIC PRESENTATION DEMO  /  23 OCTOBER 2026</a:t>
+              <a:t>ALLGIFT TECHNOLOGIES LTD  /  SYNTHETIC PRESENTATION DEMO  /  30 OCTOBER 2026</a:t>
             </a:r>
             <a:endParaRPr lang="en-GB" sz="900"/>
           </a:p>
@@ -1994,7 +1994,7 @@
                 </a:solidFill>
                 <a:latin typeface="Arial"/>
               </a:rPr>
-              <a:t>Digital PDFs, scanned PDFs/images and saved email produce a structured property-purchase case and an approved XML, JSON or CSV handoff.</a:t>
+              <a:t>Read PDFs, scans and saved email; review extracted values. Staff can add further parties and properties. Enriched cases use canonical JSON; legacy exports remain available for cases without additional details.</a:t>
             </a:r>
             <a:endParaRPr lang="en-GB" sz="1700"/>
           </a:p>
@@ -2140,7 +2140,7 @@
                 </a:solidFill>
                 <a:latin typeface="Arial"/>
               </a:rPr>
-              <a:t>ALLGIFT TECHNOLOGIES LTD  /  SYNTHETIC PRESENTATION DEMO  /  23 OCTOBER 2026</a:t>
+              <a:t>ALLGIFT TECHNOLOGIES LTD  /  SYNTHETIC PRESENTATION DEMO  /  30 OCTOBER 2026</a:t>
             </a:r>
             <a:endParaRPr lang="en-GB" sz="900"/>
           </a:p>
@@ -2565,7 +2565,7 @@
                 </a:solidFill>
                 <a:latin typeface="Arial"/>
               </a:rPr>
-              <a:t>ALLGIFT TECHNOLOGIES LTD  /  SYNTHETIC PRESENTATION DEMO  /  23 OCTOBER 2026</a:t>
+              <a:t>ALLGIFT TECHNOLOGIES LTD  /  SYNTHETIC PRESENTATION DEMO  /  30 OCTOBER 2026</a:t>
             </a:r>
             <a:endParaRPr lang="en-GB" sz="900"/>
           </a:p>
@@ -3026,7 +3026,7 @@
                 </a:solidFill>
                 <a:latin typeface="Arial"/>
               </a:rPr>
-              <a:t>ALLGIFT TECHNOLOGIES LTD  /  SYNTHETIC PRESENTATION DEMO  /  23 OCTOBER 2026</a:t>
+              <a:t>ALLGIFT TECHNOLOGIES LTD  /  SYNTHETIC PRESENTATION DEMO  /  30 OCTOBER 2026</a:t>
             </a:r>
             <a:endParaRPr lang="en-GB" sz="900"/>
           </a:p>
@@ -3451,7 +3451,7 @@
                 </a:solidFill>
                 <a:latin typeface="Arial"/>
               </a:rPr>
-              <a:t>ALLGIFT TECHNOLOGIES LTD  /  SYNTHETIC PRESENTATION DEMO  /  23 OCTOBER 2026</a:t>
+              <a:t>ALLGIFT TECHNOLOGIES LTD  /  SYNTHETIC PRESENTATION DEMO  /  30 OCTOBER 2026</a:t>
             </a:r>
             <a:endParaRPr lang="en-GB" sz="900"/>
           </a:p>
@@ -3876,7 +3876,7 @@
                 </a:solidFill>
                 <a:latin typeface="Arial"/>
               </a:rPr>
-              <a:t>ALLGIFT TECHNOLOGIES LTD  /  SYNTHETIC PRESENTATION DEMO  /  23 OCTOBER 2026</a:t>
+              <a:t>ALLGIFT TECHNOLOGIES LTD  /  SYNTHETIC PRESENTATION DEMO  /  30 OCTOBER 2026</a:t>
             </a:r>
             <a:endParaRPr lang="en-GB" sz="900"/>
           </a:p>
@@ -4301,7 +4301,7 @@
                 </a:solidFill>
                 <a:latin typeface="Arial"/>
               </a:rPr>
-              <a:t>ALLGIFT TECHNOLOGIES LTD  /  SYNTHETIC PRESENTATION DEMO  /  23 OCTOBER 2026</a:t>
+              <a:t>ALLGIFT TECHNOLOGIES LTD  /  SYNTHETIC PRESENTATION DEMO  /  30 OCTOBER 2026</a:t>
             </a:r>
             <a:endParaRPr lang="en-GB" sz="900"/>
           </a:p>
@@ -4726,7 +4726,7 @@
                 </a:solidFill>
                 <a:latin typeface="Arial"/>
               </a:rPr>
-              <a:t>ALLGIFT TECHNOLOGIES LTD  /  SYNTHETIC PRESENTATION DEMO  /  23 OCTOBER 2026</a:t>
+              <a:t>ALLGIFT TECHNOLOGIES LTD  /  SYNTHETIC PRESENTATION DEMO  /  30 OCTOBER 2026</a:t>
             </a:r>
             <a:endParaRPr lang="en-GB" sz="900"/>
           </a:p>
@@ -5151,7 +5151,7 @@
                 </a:solidFill>
                 <a:latin typeface="Arial"/>
               </a:rPr>
-              <a:t>ALLGIFT TECHNOLOGIES LTD  /  SYNTHETIC PRESENTATION DEMO  /  23 OCTOBER 2026</a:t>
+              <a:t>ALLGIFT TECHNOLOGIES LTD  /  SYNTHETIC PRESENTATION DEMO  /  30 OCTOBER 2026</a:t>
             </a:r>
             <a:endParaRPr lang="en-GB" sz="900"/>
           </a:p>
